--- a/sjoskolan/vecka-37/aktuell/v37_04_Elsakerhet_och_riskbedomning_elev.pptx
+++ b/sjoskolan/vecka-37/aktuell/v37_04_Elsakerhet_och_riskbedomning_elev.pptx
@@ -8794,7 +8794,7 @@
                 <a:ea typeface="Calibri"/>
                 <a:cs typeface="Calibri"/>
               </a:rPr>
-              <a:t>E3: Fyll i nästa riskrad</a:t>
+              <a:t>E3: Mörk gångväg</a:t>
             </a:r>
           </a:p>
         </p:txBody>
@@ -9592,7 +9592,7 @@
                 <a:ea typeface="Calibri"/>
                 <a:cs typeface="Calibri"/>
               </a:rPr>
-              <a:t>E4: Ett meddelande som går fram</a:t>
+              <a:t>E4: Tydligt meddelande</a:t>
             </a:r>
           </a:p>
         </p:txBody>
@@ -11985,7 +11985,7 @@
                 <a:ea typeface="Calibri"/>
                 <a:cs typeface="Calibri"/>
               </a:rPr>
-              <a:t>E5: Välj och motivera</a:t>
+              <a:t>E5: Reservlampor</a:t>
             </a:r>
           </a:p>
         </p:txBody>
@@ -13323,7 +13323,7 @@
                 <a:ea typeface="Calibri"/>
                 <a:cs typeface="Calibri"/>
               </a:rPr>
-              <a:t>E6: Din riskbedömning</a:t>
+              <a:t>E6: Egen riskbedömning</a:t>
             </a:r>
           </a:p>
         </p:txBody>
@@ -13597,7 +13597,7 @@
                 <a:ea typeface="Calibri"/>
                 <a:cs typeface="Calibri"/>
               </a:rPr>
-              <a:t>E7: Granska en kamrats beslut</a:t>
+              <a:t>E7: Kamratgranskning</a:t>
             </a:r>
           </a:p>
         </p:txBody>
@@ -14693,7 +14693,7 @@
                 <a:ea typeface="Calibri"/>
                 <a:cs typeface="Calibri"/>
               </a:rPr>
-              <a:t>E8: En egen slutsats</a:t>
+              <a:t>E8: Egen slutsats</a:t>
             </a:r>
           </a:p>
         </p:txBody>

--- a/sjoskolan/vecka-37/aktuell/v37_04_Elsakerhet_och_riskbedomning_elev.pptx
+++ b/sjoskolan/vecka-37/aktuell/v37_04_Elsakerhet_och_riskbedomning_elev.pptx
@@ -4569,7 +4569,7 @@
                 <a:ea typeface="Calibri"/>
                 <a:cs typeface="Calibri"/>
               </a:rPr>
-              <a:t>E2: Beslutet nu</a:t>
+              <a:t>Övning 2.4: Beslutet nu</a:t>
             </a:r>
           </a:p>
         </p:txBody>
@@ -8794,7 +8794,7 @@
                 <a:ea typeface="Calibri"/>
                 <a:cs typeface="Calibri"/>
               </a:rPr>
-              <a:t>E3: Mörk gångväg</a:t>
+              <a:t>Övning 2.5: Mörk gångväg</a:t>
             </a:r>
           </a:p>
         </p:txBody>
@@ -9592,7 +9592,7 @@
                 <a:ea typeface="Calibri"/>
                 <a:cs typeface="Calibri"/>
               </a:rPr>
-              <a:t>E4: Tydligt meddelande</a:t>
+              <a:t>Övning 2.6: Tydligt meddelande</a:t>
             </a:r>
           </a:p>
         </p:txBody>
@@ -11985,7 +11985,7 @@
                 <a:ea typeface="Calibri"/>
                 <a:cs typeface="Calibri"/>
               </a:rPr>
-              <a:t>E5: Reservlampor</a:t>
+              <a:t>Övning 2.7: Reservlampor</a:t>
             </a:r>
           </a:p>
         </p:txBody>
@@ -13323,7 +13323,7 @@
                 <a:ea typeface="Calibri"/>
                 <a:cs typeface="Calibri"/>
               </a:rPr>
-              <a:t>E6: Egen riskbedömning</a:t>
+              <a:t>Övning 2.8: Egen riskbedömning</a:t>
             </a:r>
           </a:p>
         </p:txBody>
@@ -13597,7 +13597,7 @@
                 <a:ea typeface="Calibri"/>
                 <a:cs typeface="Calibri"/>
               </a:rPr>
-              <a:t>E7: Kamratgranskning</a:t>
+              <a:t>Övning 2.9: Kamratgranskning</a:t>
             </a:r>
           </a:p>
         </p:txBody>
@@ -14693,7 +14693,7 @@
                 <a:ea typeface="Calibri"/>
                 <a:cs typeface="Calibri"/>
               </a:rPr>
-              <a:t>E8: Egen slutsats</a:t>
+              <a:t>Övning 2.10: Egen slutsats</a:t>
             </a:r>
           </a:p>
         </p:txBody>
@@ -18678,7 +18678,7 @@
                 <a:ea typeface="Calibri"/>
                 <a:cs typeface="Calibri"/>
               </a:rPr>
-              <a:t>E1: Vad är belagt?</a:t>
+              <a:t>Övning 2.3: Vad är belagt?</a:t>
             </a:r>
           </a:p>
         </p:txBody>
